--- a/project_slides_final_version_styled.pptx
+++ b/project_slides_final_version_styled.pptx
@@ -3587,7 +3587,7 @@
         <p:spPr>
           <a:xfrm>
             <a:off x="1042416" y="2029968"/>
-            <a:ext cx="5815583" cy="365760"/>
+            <a:ext cx="5815583" cy="468884"/>
           </a:xfrm>
           <a:prstGeom prst="rect">
             <a:avLst/>
@@ -3625,7 +3625,7 @@
         </p:nvSpPr>
         <p:spPr>
           <a:xfrm>
-            <a:off x="822960" y="2392426"/>
+            <a:off x="822960" y="2626868"/>
             <a:ext cx="77724" cy="77724"/>
           </a:xfrm>
           <a:prstGeom prst="rect">
@@ -3669,8 +3669,8 @@
         </p:nvSpPr>
         <p:spPr>
           <a:xfrm>
-            <a:off x="1042416" y="2314702"/>
-            <a:ext cx="5815583" cy="365760"/>
+            <a:off x="1042416" y="2549144"/>
+            <a:ext cx="5815583" cy="234442"/>
           </a:xfrm>
           <a:prstGeom prst="rect">
             <a:avLst/>
@@ -3708,7 +3708,7 @@
         </p:nvSpPr>
         <p:spPr>
           <a:xfrm>
-            <a:off x="1097280" y="2599436"/>
+            <a:off x="1097280" y="2833878"/>
             <a:ext cx="164592" cy="274320"/>
           </a:xfrm>
           <a:prstGeom prst="rect">
@@ -3747,8 +3747,8 @@
         </p:nvSpPr>
         <p:spPr>
           <a:xfrm>
-            <a:off x="1325880" y="2599436"/>
-            <a:ext cx="5532120" cy="365760"/>
+            <a:off x="1325880" y="2833878"/>
+            <a:ext cx="5532120" cy="216407"/>
           </a:xfrm>
           <a:prstGeom prst="rect">
             <a:avLst/>
@@ -3786,7 +3786,7 @@
         </p:nvSpPr>
         <p:spPr>
           <a:xfrm>
-            <a:off x="1097280" y="2884169"/>
+            <a:off x="1097280" y="3100578"/>
             <a:ext cx="164592" cy="274320"/>
           </a:xfrm>
           <a:prstGeom prst="rect">
@@ -3825,8 +3825,8 @@
         </p:nvSpPr>
         <p:spPr>
           <a:xfrm>
-            <a:off x="1325880" y="2884169"/>
-            <a:ext cx="5532120" cy="365760"/>
+            <a:off x="1325880" y="3100578"/>
+            <a:ext cx="5532120" cy="432815"/>
           </a:xfrm>
           <a:prstGeom prst="rect">
             <a:avLst/>
@@ -3864,7 +3864,7 @@
         </p:nvSpPr>
         <p:spPr>
           <a:xfrm>
-            <a:off x="822960" y="3246627"/>
+            <a:off x="822960" y="3661410"/>
             <a:ext cx="77724" cy="77724"/>
           </a:xfrm>
           <a:prstGeom prst="rect">
@@ -3908,8 +3908,8 @@
         </p:nvSpPr>
         <p:spPr>
           <a:xfrm>
-            <a:off x="1042416" y="3168903"/>
-            <a:ext cx="5815583" cy="365760"/>
+            <a:off x="1042416" y="3583686"/>
+            <a:ext cx="5815583" cy="703326"/>
           </a:xfrm>
           <a:prstGeom prst="rect">
             <a:avLst/>
@@ -3947,7 +3947,7 @@
         </p:nvSpPr>
         <p:spPr>
           <a:xfrm>
-            <a:off x="822960" y="3765804"/>
+            <a:off x="822960" y="4415028"/>
             <a:ext cx="77724" cy="77724"/>
           </a:xfrm>
           <a:prstGeom prst="rect">
@@ -3991,8 +3991,8 @@
         </p:nvSpPr>
         <p:spPr>
           <a:xfrm>
-            <a:off x="1042416" y="3688080"/>
-            <a:ext cx="5815583" cy="365760"/>
+            <a:off x="1042416" y="4337304"/>
+            <a:ext cx="5815583" cy="234442"/>
           </a:xfrm>
           <a:prstGeom prst="rect">
             <a:avLst/>
@@ -4030,7 +4030,7 @@
         </p:nvSpPr>
         <p:spPr>
           <a:xfrm>
-            <a:off x="1097280" y="3972813"/>
+            <a:off x="1097280" y="4622038"/>
             <a:ext cx="164592" cy="274320"/>
           </a:xfrm>
           <a:prstGeom prst="rect">
@@ -4069,8 +4069,8 @@
         </p:nvSpPr>
         <p:spPr>
           <a:xfrm>
-            <a:off x="1325880" y="3972813"/>
-            <a:ext cx="5532120" cy="365760"/>
+            <a:off x="1325880" y="4622038"/>
+            <a:ext cx="5532120" cy="432815"/>
           </a:xfrm>
           <a:prstGeom prst="rect">
             <a:avLst/>
@@ -4474,7 +4474,7 @@
         </p:nvSpPr>
         <p:spPr>
           <a:xfrm>
-            <a:off x="822960" y="2029968"/>
+            <a:off x="822960" y="1975104"/>
             <a:ext cx="5486400" cy="228600"/>
           </a:xfrm>
           <a:prstGeom prst="rect">
@@ -4513,8 +4513,8 @@
         </p:nvSpPr>
         <p:spPr>
           <a:xfrm>
-            <a:off x="822960" y="2304288"/>
-            <a:ext cx="2084831" cy="1481328"/>
+            <a:off x="822960" y="2231136"/>
+            <a:ext cx="2084831" cy="1426464"/>
           </a:xfrm>
           <a:prstGeom prst="rect">
             <a:avLst/>
@@ -4567,7 +4567,7 @@
         </p:blipFill>
         <p:spPr>
           <a:xfrm>
-            <a:off x="868680" y="2350008"/>
+            <a:off x="868680" y="2276856"/>
             <a:ext cx="1993391" cy="1395158"/>
           </a:xfrm>
           <a:prstGeom prst="rect">
@@ -4583,7 +4583,7 @@
         </p:nvSpPr>
         <p:spPr>
           <a:xfrm>
-            <a:off x="822960" y="3831336"/>
+            <a:off x="822960" y="3694176"/>
             <a:ext cx="2084831" cy="228600"/>
           </a:xfrm>
           <a:prstGeom prst="rect">
@@ -4622,8 +4622,8 @@
         </p:nvSpPr>
         <p:spPr>
           <a:xfrm>
-            <a:off x="3008375" y="2304288"/>
-            <a:ext cx="2084831" cy="1481328"/>
+            <a:off x="3008375" y="2231136"/>
+            <a:ext cx="2084831" cy="1426464"/>
           </a:xfrm>
           <a:prstGeom prst="rect">
             <a:avLst/>
@@ -4676,7 +4676,7 @@
         </p:blipFill>
         <p:spPr>
           <a:xfrm>
-            <a:off x="3054095" y="2350008"/>
+            <a:off x="3054095" y="2276856"/>
             <a:ext cx="1993391" cy="1374379"/>
           </a:xfrm>
           <a:prstGeom prst="rect">
@@ -4692,7 +4692,7 @@
         </p:nvSpPr>
         <p:spPr>
           <a:xfrm>
-            <a:off x="3008375" y="3831336"/>
+            <a:off x="3008375" y="3694176"/>
             <a:ext cx="2084831" cy="228600"/>
           </a:xfrm>
           <a:prstGeom prst="rect">
@@ -4731,8 +4731,8 @@
         </p:nvSpPr>
         <p:spPr>
           <a:xfrm>
-            <a:off x="5193792" y="2304288"/>
-            <a:ext cx="2084831" cy="1481328"/>
+            <a:off x="5193792" y="2231136"/>
+            <a:ext cx="2084831" cy="1426464"/>
           </a:xfrm>
           <a:prstGeom prst="rect">
             <a:avLst/>
@@ -4785,7 +4785,7 @@
         </p:blipFill>
         <p:spPr>
           <a:xfrm>
-            <a:off x="5239512" y="2350008"/>
+            <a:off x="5239512" y="2276856"/>
             <a:ext cx="1993391" cy="1389728"/>
           </a:xfrm>
           <a:prstGeom prst="rect">
@@ -4801,7 +4801,7 @@
         </p:nvSpPr>
         <p:spPr>
           <a:xfrm>
-            <a:off x="5193792" y="3831336"/>
+            <a:off x="5193792" y="3694176"/>
             <a:ext cx="2084831" cy="228600"/>
           </a:xfrm>
           <a:prstGeom prst="rect">
@@ -4840,8 +4840,8 @@
         </p:nvSpPr>
         <p:spPr>
           <a:xfrm>
-            <a:off x="7379207" y="2304288"/>
-            <a:ext cx="2084831" cy="1481328"/>
+            <a:off x="7379207" y="2231136"/>
+            <a:ext cx="2084831" cy="1426464"/>
           </a:xfrm>
           <a:prstGeom prst="rect">
             <a:avLst/>
@@ -4894,7 +4894,7 @@
         </p:blipFill>
         <p:spPr>
           <a:xfrm>
-            <a:off x="7424927" y="2350008"/>
+            <a:off x="7424927" y="2276856"/>
             <a:ext cx="1993391" cy="1385018"/>
           </a:xfrm>
           <a:prstGeom prst="rect">
@@ -4910,7 +4910,7 @@
         </p:nvSpPr>
         <p:spPr>
           <a:xfrm>
-            <a:off x="7379207" y="3831336"/>
+            <a:off x="7379207" y="3694176"/>
             <a:ext cx="2084831" cy="228600"/>
           </a:xfrm>
           <a:prstGeom prst="rect">
@@ -4949,8 +4949,8 @@
         </p:nvSpPr>
         <p:spPr>
           <a:xfrm>
-            <a:off x="9564624" y="2304288"/>
-            <a:ext cx="2084831" cy="1481328"/>
+            <a:off x="9564624" y="2231136"/>
+            <a:ext cx="2084831" cy="1426464"/>
           </a:xfrm>
           <a:prstGeom prst="rect">
             <a:avLst/>
@@ -5003,7 +5003,7 @@
         </p:blipFill>
         <p:spPr>
           <a:xfrm>
-            <a:off x="9610344" y="2350008"/>
+            <a:off x="9610344" y="2276856"/>
             <a:ext cx="1993391" cy="1370322"/>
           </a:xfrm>
           <a:prstGeom prst="rect">
@@ -5019,7 +5019,7 @@
         </p:nvSpPr>
         <p:spPr>
           <a:xfrm>
-            <a:off x="9564624" y="3831336"/>
+            <a:off x="9564624" y="3694176"/>
             <a:ext cx="2084831" cy="228600"/>
           </a:xfrm>
           <a:prstGeom prst="rect">
@@ -5058,7 +5058,7 @@
         </p:nvSpPr>
         <p:spPr>
           <a:xfrm>
-            <a:off x="822960" y="4224528"/>
+            <a:off x="822960" y="4005072"/>
             <a:ext cx="10561320" cy="18288"/>
           </a:xfrm>
           <a:prstGeom prst="rect">
@@ -5102,7 +5102,7 @@
         </p:nvSpPr>
         <p:spPr>
           <a:xfrm>
-            <a:off x="822960" y="4443984"/>
+            <a:off x="822960" y="4187952"/>
             <a:ext cx="5029200" cy="274320"/>
           </a:xfrm>
           <a:prstGeom prst="rect">
@@ -5141,7 +5141,7 @@
         </p:nvSpPr>
         <p:spPr>
           <a:xfrm>
-            <a:off x="1097280" y="4773168"/>
+            <a:off x="1097280" y="4517136"/>
             <a:ext cx="164592" cy="274320"/>
           </a:xfrm>
           <a:prstGeom prst="rect">
@@ -5180,8 +5180,8 @@
         </p:nvSpPr>
         <p:spPr>
           <a:xfrm>
-            <a:off x="1325880" y="4773168"/>
-            <a:ext cx="4526280" cy="365760"/>
+            <a:off x="1325880" y="4517136"/>
+            <a:ext cx="4526280" cy="378714"/>
           </a:xfrm>
           <a:prstGeom prst="rect">
             <a:avLst/>
@@ -5219,7 +5219,7 @@
         </p:nvSpPr>
         <p:spPr>
           <a:xfrm>
-            <a:off x="1097280" y="5017135"/>
+            <a:off x="1097280" y="4932426"/>
             <a:ext cx="164592" cy="274320"/>
           </a:xfrm>
           <a:prstGeom prst="rect">
@@ -5258,8 +5258,8 @@
         </p:nvSpPr>
         <p:spPr>
           <a:xfrm>
-            <a:off x="1325880" y="5017135"/>
-            <a:ext cx="4526280" cy="365760"/>
+            <a:off x="1325880" y="4932426"/>
+            <a:ext cx="4526280" cy="378714"/>
           </a:xfrm>
           <a:prstGeom prst="rect">
             <a:avLst/>
@@ -5297,7 +5297,7 @@
         </p:nvSpPr>
         <p:spPr>
           <a:xfrm>
-            <a:off x="1097280" y="5468493"/>
+            <a:off x="1097280" y="5347716"/>
             <a:ext cx="164592" cy="274320"/>
           </a:xfrm>
           <a:prstGeom prst="rect">
@@ -5336,8 +5336,8 @@
         </p:nvSpPr>
         <p:spPr>
           <a:xfrm>
-            <a:off x="1325880" y="5468493"/>
-            <a:ext cx="4526280" cy="365760"/>
+            <a:off x="1325880" y="5347716"/>
+            <a:ext cx="4526280" cy="378714"/>
           </a:xfrm>
           <a:prstGeom prst="rect">
             <a:avLst/>
@@ -5375,7 +5375,7 @@
         </p:nvSpPr>
         <p:spPr>
           <a:xfrm>
-            <a:off x="6400800" y="4443984"/>
+            <a:off x="6400800" y="4187952"/>
             <a:ext cx="4983480" cy="274320"/>
           </a:xfrm>
           <a:prstGeom prst="rect">
@@ -5414,7 +5414,7 @@
         </p:nvSpPr>
         <p:spPr>
           <a:xfrm>
-            <a:off x="6675120" y="4773168"/>
+            <a:off x="6675120" y="4517136"/>
             <a:ext cx="164592" cy="274320"/>
           </a:xfrm>
           <a:prstGeom prst="rect">
@@ -5453,8 +5453,8 @@
         </p:nvSpPr>
         <p:spPr>
           <a:xfrm>
-            <a:off x="6903720" y="4773168"/>
-            <a:ext cx="4480560" cy="365760"/>
+            <a:off x="6903720" y="4517136"/>
+            <a:ext cx="4480560" cy="189357"/>
           </a:xfrm>
           <a:prstGeom prst="rect">
             <a:avLst/>
@@ -5492,7 +5492,7 @@
         </p:nvSpPr>
         <p:spPr>
           <a:xfrm>
-            <a:off x="6675120" y="5017135"/>
+            <a:off x="6675120" y="4743069"/>
             <a:ext cx="164592" cy="274320"/>
           </a:xfrm>
           <a:prstGeom prst="rect">
@@ -5531,8 +5531,8 @@
         </p:nvSpPr>
         <p:spPr>
           <a:xfrm>
-            <a:off x="6903720" y="5017135"/>
-            <a:ext cx="4480560" cy="365760"/>
+            <a:off x="6903720" y="4743069"/>
+            <a:ext cx="4480560" cy="378714"/>
           </a:xfrm>
           <a:prstGeom prst="rect">
             <a:avLst/>
@@ -5570,7 +5570,7 @@
         </p:nvSpPr>
         <p:spPr>
           <a:xfrm>
-            <a:off x="6675120" y="5261102"/>
+            <a:off x="6675120" y="5158359"/>
             <a:ext cx="164592" cy="274320"/>
           </a:xfrm>
           <a:prstGeom prst="rect">
@@ -5609,8 +5609,8 @@
         </p:nvSpPr>
         <p:spPr>
           <a:xfrm>
-            <a:off x="6903720" y="5261102"/>
-            <a:ext cx="4480560" cy="365760"/>
+            <a:off x="6903720" y="5158359"/>
+            <a:ext cx="4480560" cy="189357"/>
           </a:xfrm>
           <a:prstGeom prst="rect">
             <a:avLst/>
@@ -5648,7 +5648,7 @@
         </p:nvSpPr>
         <p:spPr>
           <a:xfrm>
-            <a:off x="6675120" y="5505068"/>
+            <a:off x="6675120" y="5384292"/>
             <a:ext cx="164592" cy="274320"/>
           </a:xfrm>
           <a:prstGeom prst="rect">
@@ -5687,8 +5687,8 @@
         </p:nvSpPr>
         <p:spPr>
           <a:xfrm>
-            <a:off x="6903720" y="5505068"/>
-            <a:ext cx="4480560" cy="365760"/>
+            <a:off x="6903720" y="5384292"/>
+            <a:ext cx="4480560" cy="189357"/>
           </a:xfrm>
           <a:prstGeom prst="rect">
             <a:avLst/>

--- a/project_slides_final_version_styled.pptx
+++ b/project_slides_final_version_styled.pptx
@@ -8,6 +8,7 @@
     <p:sldId id="256" r:id="rId7"/>
     <p:sldId id="257" r:id="rId8"/>
     <p:sldId id="258" r:id="rId9"/>
+    <p:sldId id="259" r:id="rId10"/>
   </p:sldIdLst>
   <p:sldSz cx="12191695" cy="6858000" type="screen4x3"/>
   <p:notesSz cx="6858000" cy="9144000"/>
@@ -4250,6 +4251,1990 @@
             <a:avLst/>
           </a:prstGeom>
           <a:solidFill>
+            <a:srgbClr val="B4741F"/>
+          </a:solidFill>
+          <a:ln>
+            <a:noFill/>
+          </a:ln>
+          <a:effectLst/>
+        </p:spPr>
+        <p:style>
+          <a:lnRef idx="1">
+            <a:schemeClr val="accent1"/>
+          </a:lnRef>
+          <a:fillRef idx="3">
+            <a:schemeClr val="accent1"/>
+          </a:fillRef>
+          <a:effectRef idx="2">
+            <a:schemeClr val="accent1"/>
+          </a:effectRef>
+          <a:fontRef idx="minor">
+            <a:schemeClr val="lt1"/>
+          </a:fontRef>
+        </p:style>
+        <p:txBody>
+          <a:bodyPr rtlCol="0" anchor="ctr"/>
+          <a:lstStyle/>
+          <a:p>
+            <a:pPr algn="ctr"/>
+          </a:p>
+        </p:txBody>
+      </p:sp>
+      <p:sp>
+        <p:nvSpPr>
+          <p:cNvPr id="3" name="TextBox 2"/>
+          <p:cNvSpPr txBox="1"/>
+          <p:nvPr/>
+        </p:nvSpPr>
+        <p:spPr>
+          <a:xfrm>
+            <a:off x="822960" y="310896"/>
+            <a:ext cx="5486400" cy="274320"/>
+          </a:xfrm>
+          <a:prstGeom prst="rect">
+            <a:avLst/>
+          </a:prstGeom>
+          <a:noFill/>
+        </p:spPr>
+        <p:txBody>
+          <a:bodyPr wrap="square" lIns="0" rIns="0" tIns="0" bIns="0">
+            <a:spAutoFit/>
+          </a:bodyPr>
+          <a:lstStyle/>
+          <a:p>
+            <a:pPr algn="l">
+              <a:lnSpc>
+                <a:spcPct val="130000"/>
+              </a:lnSpc>
+            </a:pPr>
+            <a:r>
+              <a:rPr sz="1100" b="0" spc="160">
+                <a:solidFill>
+                  <a:srgbClr val="6B7A87"/>
+                </a:solidFill>
+                <a:latin typeface="Consolas"/>
+              </a:rPr>
+              <a:t>02</a:t>
+            </a:r>
+          </a:p>
+        </p:txBody>
+      </p:sp>
+      <p:sp>
+        <p:nvSpPr>
+          <p:cNvPr id="4" name="TextBox 3"/>
+          <p:cNvSpPr txBox="1"/>
+          <p:nvPr/>
+        </p:nvSpPr>
+        <p:spPr>
+          <a:xfrm>
+            <a:off x="822960" y="585216"/>
+            <a:ext cx="7315200" cy="640080"/>
+          </a:xfrm>
+          <a:prstGeom prst="rect">
+            <a:avLst/>
+          </a:prstGeom>
+          <a:noFill/>
+        </p:spPr>
+        <p:txBody>
+          <a:bodyPr wrap="square" lIns="0" rIns="0" tIns="0" bIns="0">
+            <a:spAutoFit/>
+          </a:bodyPr>
+          <a:lstStyle/>
+          <a:p>
+            <a:pPr algn="l">
+              <a:lnSpc>
+                <a:spcPct val="130000"/>
+              </a:lnSpc>
+            </a:pPr>
+            <a:r>
+              <a:rPr sz="3400" b="1">
+                <a:solidFill>
+                  <a:srgbClr val="0D141C"/>
+                </a:solidFill>
+                <a:latin typeface="Archivo"/>
+              </a:rPr>
+              <a:t>Methods</a:t>
+            </a:r>
+          </a:p>
+        </p:txBody>
+      </p:sp>
+      <p:sp>
+        <p:nvSpPr>
+          <p:cNvPr id="5" name="TextBox 4"/>
+          <p:cNvSpPr txBox="1"/>
+          <p:nvPr/>
+        </p:nvSpPr>
+        <p:spPr>
+          <a:xfrm>
+            <a:off x="822960" y="1188720"/>
+            <a:ext cx="10607040" cy="320040"/>
+          </a:xfrm>
+          <a:prstGeom prst="rect">
+            <a:avLst/>
+          </a:prstGeom>
+          <a:noFill/>
+        </p:spPr>
+        <p:txBody>
+          <a:bodyPr wrap="square" lIns="0" rIns="0" tIns="0" bIns="0">
+            <a:spAutoFit/>
+          </a:bodyPr>
+          <a:lstStyle/>
+          <a:p>
+            <a:pPr algn="l">
+              <a:lnSpc>
+                <a:spcPct val="130000"/>
+              </a:lnSpc>
+            </a:pPr>
+            <a:r>
+              <a:rPr sz="1350" b="0">
+                <a:solidFill>
+                  <a:srgbClr val="3B4A59"/>
+                </a:solidFill>
+                <a:latin typeface="Archivo"/>
+              </a:rPr>
+              <a:t>One prompt, one fixed correlation table, five levels of evidence. Only what the agent can learn about data quality changes.</a:t>
+            </a:r>
+          </a:p>
+        </p:txBody>
+      </p:sp>
+      <p:sp>
+        <p:nvSpPr>
+          <p:cNvPr id="6" name="TextBox 5"/>
+          <p:cNvSpPr txBox="1"/>
+          <p:nvPr/>
+        </p:nvSpPr>
+        <p:spPr>
+          <a:xfrm>
+            <a:off x="822960" y="1755648"/>
+            <a:ext cx="5120640" cy="228600"/>
+          </a:xfrm>
+          <a:prstGeom prst="rect">
+            <a:avLst/>
+          </a:prstGeom>
+          <a:noFill/>
+        </p:spPr>
+        <p:txBody>
+          <a:bodyPr wrap="square" lIns="0" rIns="0" tIns="0" bIns="0">
+            <a:spAutoFit/>
+          </a:bodyPr>
+          <a:lstStyle/>
+          <a:p>
+            <a:pPr algn="l">
+              <a:lnSpc>
+                <a:spcPct val="130000"/>
+              </a:lnSpc>
+            </a:pPr>
+            <a:r>
+              <a:rPr sz="1000" b="0" spc="130">
+                <a:solidFill>
+                  <a:srgbClr val="6B7A87"/>
+                </a:solidFill>
+                <a:latin typeface="Consolas"/>
+              </a:rPr>
+              <a:t>PIPELINE</a:t>
+            </a:r>
+          </a:p>
+        </p:txBody>
+      </p:sp>
+      <p:sp>
+        <p:nvSpPr>
+          <p:cNvPr id="7" name="Rectangle 6"/>
+          <p:cNvSpPr/>
+          <p:nvPr/>
+        </p:nvSpPr>
+        <p:spPr>
+          <a:xfrm>
+            <a:off x="822960" y="2048256"/>
+            <a:ext cx="274320" cy="274320"/>
+          </a:xfrm>
+          <a:prstGeom prst="rect">
+            <a:avLst/>
+          </a:prstGeom>
+          <a:solidFill>
+            <a:srgbClr val="0D141C"/>
+          </a:solidFill>
+          <a:ln>
+            <a:noFill/>
+          </a:ln>
+          <a:effectLst/>
+        </p:spPr>
+        <p:style>
+          <a:lnRef idx="1">
+            <a:schemeClr val="accent1"/>
+          </a:lnRef>
+          <a:fillRef idx="3">
+            <a:schemeClr val="accent1"/>
+          </a:fillRef>
+          <a:effectRef idx="2">
+            <a:schemeClr val="accent1"/>
+          </a:effectRef>
+          <a:fontRef idx="minor">
+            <a:schemeClr val="lt1"/>
+          </a:fontRef>
+        </p:style>
+        <p:txBody>
+          <a:bodyPr rtlCol="0" anchor="ctr"/>
+          <a:lstStyle/>
+          <a:p>
+            <a:pPr algn="ctr"/>
+          </a:p>
+        </p:txBody>
+      </p:sp>
+      <p:sp>
+        <p:nvSpPr>
+          <p:cNvPr id="8" name="TextBox 7"/>
+          <p:cNvSpPr txBox="1"/>
+          <p:nvPr/>
+        </p:nvSpPr>
+        <p:spPr>
+          <a:xfrm>
+            <a:off x="822960" y="2098548"/>
+            <a:ext cx="274320" cy="228600"/>
+          </a:xfrm>
+          <a:prstGeom prst="rect">
+            <a:avLst/>
+          </a:prstGeom>
+          <a:noFill/>
+        </p:spPr>
+        <p:txBody>
+          <a:bodyPr wrap="square" lIns="0" rIns="0" tIns="0" bIns="0">
+            <a:spAutoFit/>
+          </a:bodyPr>
+          <a:lstStyle/>
+          <a:p>
+            <a:pPr algn="ctr">
+              <a:lnSpc>
+                <a:spcPct val="130000"/>
+              </a:lnSpc>
+            </a:pPr>
+            <a:r>
+              <a:rPr sz="1200" b="1">
+                <a:solidFill>
+                  <a:srgbClr val="F2F5F7"/>
+                </a:solidFill>
+                <a:latin typeface="Consolas"/>
+              </a:rPr>
+              <a:t>1</a:t>
+            </a:r>
+          </a:p>
+        </p:txBody>
+      </p:sp>
+      <p:sp>
+        <p:nvSpPr>
+          <p:cNvPr id="9" name="TextBox 8"/>
+          <p:cNvSpPr txBox="1"/>
+          <p:nvPr/>
+        </p:nvSpPr>
+        <p:spPr>
+          <a:xfrm>
+            <a:off x="1225296" y="2057400"/>
+            <a:ext cx="4754880" cy="228600"/>
+          </a:xfrm>
+          <a:prstGeom prst="rect">
+            <a:avLst/>
+          </a:prstGeom>
+          <a:noFill/>
+        </p:spPr>
+        <p:txBody>
+          <a:bodyPr wrap="square" lIns="0" rIns="0" tIns="0" bIns="0">
+            <a:spAutoFit/>
+          </a:bodyPr>
+          <a:lstStyle/>
+          <a:p>
+            <a:pPr algn="l">
+              <a:lnSpc>
+                <a:spcPct val="130000"/>
+              </a:lnSpc>
+            </a:pPr>
+            <a:r>
+              <a:rPr sz="1300" b="1">
+                <a:solidFill>
+                  <a:srgbClr val="0D141C"/>
+                </a:solidFill>
+                <a:latin typeface="Archivo"/>
+              </a:rPr>
+              <a:t>Prompt</a:t>
+            </a:r>
+          </a:p>
+        </p:txBody>
+      </p:sp>
+      <p:sp>
+        <p:nvSpPr>
+          <p:cNvPr id="10" name="TextBox 9"/>
+          <p:cNvSpPr txBox="1"/>
+          <p:nvPr/>
+        </p:nvSpPr>
+        <p:spPr>
+          <a:xfrm>
+            <a:off x="1225296" y="2304288"/>
+            <a:ext cx="4617720" cy="384048"/>
+          </a:xfrm>
+          <a:prstGeom prst="rect">
+            <a:avLst/>
+          </a:prstGeom>
+          <a:noFill/>
+        </p:spPr>
+        <p:txBody>
+          <a:bodyPr wrap="square" lIns="0" rIns="0" tIns="0" bIns="0">
+            <a:spAutoFit/>
+          </a:bodyPr>
+          <a:lstStyle/>
+          <a:p>
+            <a:pPr algn="l">
+              <a:lnSpc>
+                <a:spcPct val="125000"/>
+              </a:lnSpc>
+            </a:pPr>
+            <a:r>
+              <a:rPr sz="1050" b="0">
+                <a:solidFill>
+                  <a:srgbClr val="3B4A59"/>
+                </a:solidFill>
+                <a:latin typeface="Archivo"/>
+              </a:rPr>
+              <a:t>63 Spearman correlations, two-sided, p &lt; 0.05, uncorrected. Plus: exclude subjects that induce spurious correlations.</a:t>
+            </a:r>
+          </a:p>
+        </p:txBody>
+      </p:sp>
+      <p:sp>
+        <p:nvSpPr>
+          <p:cNvPr id="11" name="TextBox 10"/>
+          <p:cNvSpPr txBox="1"/>
+          <p:nvPr/>
+        </p:nvSpPr>
+        <p:spPr>
+          <a:xfrm>
+            <a:off x="932688" y="2633472"/>
+            <a:ext cx="274320" cy="182880"/>
+          </a:xfrm>
+          <a:prstGeom prst="rect">
+            <a:avLst/>
+          </a:prstGeom>
+          <a:noFill/>
+        </p:spPr>
+        <p:txBody>
+          <a:bodyPr wrap="square" lIns="0" rIns="0" tIns="0" bIns="0">
+            <a:spAutoFit/>
+          </a:bodyPr>
+          <a:lstStyle/>
+          <a:p>
+            <a:pPr algn="l">
+              <a:lnSpc>
+                <a:spcPct val="130000"/>
+              </a:lnSpc>
+            </a:pPr>
+            <a:r>
+              <a:rPr sz="1100" b="0">
+                <a:solidFill>
+                  <a:srgbClr val="D3DBE2"/>
+                </a:solidFill>
+                <a:latin typeface="Consolas"/>
+              </a:rPr>
+              <a:t>↓</a:t>
+            </a:r>
+          </a:p>
+        </p:txBody>
+      </p:sp>
+      <p:sp>
+        <p:nvSpPr>
+          <p:cNvPr id="12" name="Rectangle 11"/>
+          <p:cNvSpPr/>
+          <p:nvPr/>
+        </p:nvSpPr>
+        <p:spPr>
+          <a:xfrm>
+            <a:off x="822960" y="2907792"/>
+            <a:ext cx="274320" cy="274320"/>
+          </a:xfrm>
+          <a:prstGeom prst="rect">
+            <a:avLst/>
+          </a:prstGeom>
+          <a:solidFill>
+            <a:srgbClr val="0D141C"/>
+          </a:solidFill>
+          <a:ln>
+            <a:noFill/>
+          </a:ln>
+          <a:effectLst/>
+        </p:spPr>
+        <p:style>
+          <a:lnRef idx="1">
+            <a:schemeClr val="accent1"/>
+          </a:lnRef>
+          <a:fillRef idx="3">
+            <a:schemeClr val="accent1"/>
+          </a:fillRef>
+          <a:effectRef idx="2">
+            <a:schemeClr val="accent1"/>
+          </a:effectRef>
+          <a:fontRef idx="minor">
+            <a:schemeClr val="lt1"/>
+          </a:fontRef>
+        </p:style>
+        <p:txBody>
+          <a:bodyPr rtlCol="0" anchor="ctr"/>
+          <a:lstStyle/>
+          <a:p>
+            <a:pPr algn="ctr"/>
+          </a:p>
+        </p:txBody>
+      </p:sp>
+      <p:sp>
+        <p:nvSpPr>
+          <p:cNvPr id="13" name="TextBox 12"/>
+          <p:cNvSpPr txBox="1"/>
+          <p:nvPr/>
+        </p:nvSpPr>
+        <p:spPr>
+          <a:xfrm>
+            <a:off x="822960" y="2958084"/>
+            <a:ext cx="274320" cy="228600"/>
+          </a:xfrm>
+          <a:prstGeom prst="rect">
+            <a:avLst/>
+          </a:prstGeom>
+          <a:noFill/>
+        </p:spPr>
+        <p:txBody>
+          <a:bodyPr wrap="square" lIns="0" rIns="0" tIns="0" bIns="0">
+            <a:spAutoFit/>
+          </a:bodyPr>
+          <a:lstStyle/>
+          <a:p>
+            <a:pPr algn="ctr">
+              <a:lnSpc>
+                <a:spcPct val="130000"/>
+              </a:lnSpc>
+            </a:pPr>
+            <a:r>
+              <a:rPr sz="1200" b="1">
+                <a:solidFill>
+                  <a:srgbClr val="F2F5F7"/>
+                </a:solidFill>
+                <a:latin typeface="Consolas"/>
+              </a:rPr>
+              <a:t>2</a:t>
+            </a:r>
+          </a:p>
+        </p:txBody>
+      </p:sp>
+      <p:sp>
+        <p:nvSpPr>
+          <p:cNvPr id="14" name="TextBox 13"/>
+          <p:cNvSpPr txBox="1"/>
+          <p:nvPr/>
+        </p:nvSpPr>
+        <p:spPr>
+          <a:xfrm>
+            <a:off x="1225296" y="2916936"/>
+            <a:ext cx="4754880" cy="228600"/>
+          </a:xfrm>
+          <a:prstGeom prst="rect">
+            <a:avLst/>
+          </a:prstGeom>
+          <a:noFill/>
+        </p:spPr>
+        <p:txBody>
+          <a:bodyPr wrap="square" lIns="0" rIns="0" tIns="0" bIns="0">
+            <a:spAutoFit/>
+          </a:bodyPr>
+          <a:lstStyle/>
+          <a:p>
+            <a:pPr algn="l">
+              <a:lnSpc>
+                <a:spcPct val="130000"/>
+              </a:lnSpc>
+            </a:pPr>
+            <a:r>
+              <a:rPr sz="1300" b="1">
+                <a:solidFill>
+                  <a:srgbClr val="0D141C"/>
+                </a:solidFill>
+                <a:latin typeface="Archivo"/>
+              </a:rPr>
+              <a:t>Agent</a:t>
+            </a:r>
+          </a:p>
+        </p:txBody>
+      </p:sp>
+      <p:sp>
+        <p:nvSpPr>
+          <p:cNvPr id="15" name="TextBox 14"/>
+          <p:cNvSpPr txBox="1"/>
+          <p:nvPr/>
+        </p:nvSpPr>
+        <p:spPr>
+          <a:xfrm>
+            <a:off x="1225296" y="3163824"/>
+            <a:ext cx="4617720" cy="384048"/>
+          </a:xfrm>
+          <a:prstGeom prst="rect">
+            <a:avLst/>
+          </a:prstGeom>
+          <a:noFill/>
+        </p:spPr>
+        <p:txBody>
+          <a:bodyPr wrap="square" lIns="0" rIns="0" tIns="0" bIns="0">
+            <a:spAutoFit/>
+          </a:bodyPr>
+          <a:lstStyle/>
+          <a:p>
+            <a:pPr algn="l">
+              <a:lnSpc>
+                <a:spcPct val="125000"/>
+              </a:lnSpc>
+            </a:pPr>
+            <a:r>
+              <a:rPr sz="1050" b="0">
+                <a:solidFill>
+                  <a:srgbClr val="3B4A59"/>
+                </a:solidFill>
+                <a:latin typeface="Archivo"/>
+              </a:rPr>
+              <a:t>Writes and executes its own Python. Free to inspect, revise, and re-run; nothing about the order is fixed.</a:t>
+            </a:r>
+          </a:p>
+        </p:txBody>
+      </p:sp>
+      <p:sp>
+        <p:nvSpPr>
+          <p:cNvPr id="16" name="TextBox 15"/>
+          <p:cNvSpPr txBox="1"/>
+          <p:nvPr/>
+        </p:nvSpPr>
+        <p:spPr>
+          <a:xfrm>
+            <a:off x="932688" y="3493008"/>
+            <a:ext cx="274320" cy="182880"/>
+          </a:xfrm>
+          <a:prstGeom prst="rect">
+            <a:avLst/>
+          </a:prstGeom>
+          <a:noFill/>
+        </p:spPr>
+        <p:txBody>
+          <a:bodyPr wrap="square" lIns="0" rIns="0" tIns="0" bIns="0">
+            <a:spAutoFit/>
+          </a:bodyPr>
+          <a:lstStyle/>
+          <a:p>
+            <a:pPr algn="l">
+              <a:lnSpc>
+                <a:spcPct val="130000"/>
+              </a:lnSpc>
+            </a:pPr>
+            <a:r>
+              <a:rPr sz="1100" b="0">
+                <a:solidFill>
+                  <a:srgbClr val="D3DBE2"/>
+                </a:solidFill>
+                <a:latin typeface="Consolas"/>
+              </a:rPr>
+              <a:t>↓</a:t>
+            </a:r>
+          </a:p>
+        </p:txBody>
+      </p:sp>
+      <p:sp>
+        <p:nvSpPr>
+          <p:cNvPr id="17" name="Rectangle 16"/>
+          <p:cNvSpPr/>
+          <p:nvPr/>
+        </p:nvSpPr>
+        <p:spPr>
+          <a:xfrm>
+            <a:off x="822960" y="3767328"/>
+            <a:ext cx="274320" cy="274320"/>
+          </a:xfrm>
+          <a:prstGeom prst="rect">
+            <a:avLst/>
+          </a:prstGeom>
+          <a:solidFill>
+            <a:srgbClr val="0D141C"/>
+          </a:solidFill>
+          <a:ln>
+            <a:noFill/>
+          </a:ln>
+          <a:effectLst/>
+        </p:spPr>
+        <p:style>
+          <a:lnRef idx="1">
+            <a:schemeClr val="accent1"/>
+          </a:lnRef>
+          <a:fillRef idx="3">
+            <a:schemeClr val="accent1"/>
+          </a:fillRef>
+          <a:effectRef idx="2">
+            <a:schemeClr val="accent1"/>
+          </a:effectRef>
+          <a:fontRef idx="minor">
+            <a:schemeClr val="lt1"/>
+          </a:fontRef>
+        </p:style>
+        <p:txBody>
+          <a:bodyPr rtlCol="0" anchor="ctr"/>
+          <a:lstStyle/>
+          <a:p>
+            <a:pPr algn="ctr"/>
+          </a:p>
+        </p:txBody>
+      </p:sp>
+      <p:sp>
+        <p:nvSpPr>
+          <p:cNvPr id="18" name="TextBox 17"/>
+          <p:cNvSpPr txBox="1"/>
+          <p:nvPr/>
+        </p:nvSpPr>
+        <p:spPr>
+          <a:xfrm>
+            <a:off x="822960" y="3817620"/>
+            <a:ext cx="274320" cy="228600"/>
+          </a:xfrm>
+          <a:prstGeom prst="rect">
+            <a:avLst/>
+          </a:prstGeom>
+          <a:noFill/>
+        </p:spPr>
+        <p:txBody>
+          <a:bodyPr wrap="square" lIns="0" rIns="0" tIns="0" bIns="0">
+            <a:spAutoFit/>
+          </a:bodyPr>
+          <a:lstStyle/>
+          <a:p>
+            <a:pPr algn="ctr">
+              <a:lnSpc>
+                <a:spcPct val="130000"/>
+              </a:lnSpc>
+            </a:pPr>
+            <a:r>
+              <a:rPr sz="1200" b="1">
+                <a:solidFill>
+                  <a:srgbClr val="F2F5F7"/>
+                </a:solidFill>
+                <a:latin typeface="Consolas"/>
+              </a:rPr>
+              <a:t>3</a:t>
+            </a:r>
+          </a:p>
+        </p:txBody>
+      </p:sp>
+      <p:sp>
+        <p:nvSpPr>
+          <p:cNvPr id="19" name="TextBox 18"/>
+          <p:cNvSpPr txBox="1"/>
+          <p:nvPr/>
+        </p:nvSpPr>
+        <p:spPr>
+          <a:xfrm>
+            <a:off x="1225296" y="3776472"/>
+            <a:ext cx="4754880" cy="228600"/>
+          </a:xfrm>
+          <a:prstGeom prst="rect">
+            <a:avLst/>
+          </a:prstGeom>
+          <a:noFill/>
+        </p:spPr>
+        <p:txBody>
+          <a:bodyPr wrap="square" lIns="0" rIns="0" tIns="0" bIns="0">
+            <a:spAutoFit/>
+          </a:bodyPr>
+          <a:lstStyle/>
+          <a:p>
+            <a:pPr algn="l">
+              <a:lnSpc>
+                <a:spcPct val="130000"/>
+              </a:lnSpc>
+            </a:pPr>
+            <a:r>
+              <a:rPr sz="1300" b="1">
+                <a:solidFill>
+                  <a:srgbClr val="0D141C"/>
+                </a:solidFill>
+                <a:latin typeface="Archivo"/>
+              </a:rPr>
+              <a:t>Trace</a:t>
+            </a:r>
+          </a:p>
+        </p:txBody>
+      </p:sp>
+      <p:sp>
+        <p:nvSpPr>
+          <p:cNvPr id="20" name="TextBox 19"/>
+          <p:cNvSpPr txBox="1"/>
+          <p:nvPr/>
+        </p:nvSpPr>
+        <p:spPr>
+          <a:xfrm>
+            <a:off x="1225296" y="4023360"/>
+            <a:ext cx="4617720" cy="384048"/>
+          </a:xfrm>
+          <a:prstGeom prst="rect">
+            <a:avLst/>
+          </a:prstGeom>
+          <a:noFill/>
+        </p:spPr>
+        <p:txBody>
+          <a:bodyPr wrap="square" lIns="0" rIns="0" tIns="0" bIns="0">
+            <a:spAutoFit/>
+          </a:bodyPr>
+          <a:lstStyle/>
+          <a:p>
+            <a:pPr algn="l">
+              <a:lnSpc>
+                <a:spcPct val="125000"/>
+              </a:lnSpc>
+            </a:pPr>
+            <a:r>
+              <a:rPr sz="1050" b="0">
+                <a:solidFill>
+                  <a:srgbClr val="3B4A59"/>
+                </a:solidFill>
+                <a:latin typeface="Archivo"/>
+              </a:rPr>
+              <a:t>9 fields per step: phase, thought, action, observation, error, revision trigger, confidence, id, timestamp.</a:t>
+            </a:r>
+          </a:p>
+        </p:txBody>
+      </p:sp>
+      <p:sp>
+        <p:nvSpPr>
+          <p:cNvPr id="21" name="TextBox 20"/>
+          <p:cNvSpPr txBox="1"/>
+          <p:nvPr/>
+        </p:nvSpPr>
+        <p:spPr>
+          <a:xfrm>
+            <a:off x="932688" y="4352544"/>
+            <a:ext cx="274320" cy="182880"/>
+          </a:xfrm>
+          <a:prstGeom prst="rect">
+            <a:avLst/>
+          </a:prstGeom>
+          <a:noFill/>
+        </p:spPr>
+        <p:txBody>
+          <a:bodyPr wrap="square" lIns="0" rIns="0" tIns="0" bIns="0">
+            <a:spAutoFit/>
+          </a:bodyPr>
+          <a:lstStyle/>
+          <a:p>
+            <a:pPr algn="l">
+              <a:lnSpc>
+                <a:spcPct val="130000"/>
+              </a:lnSpc>
+            </a:pPr>
+            <a:r>
+              <a:rPr sz="1100" b="0">
+                <a:solidFill>
+                  <a:srgbClr val="D3DBE2"/>
+                </a:solidFill>
+                <a:latin typeface="Consolas"/>
+              </a:rPr>
+              <a:t>↓</a:t>
+            </a:r>
+          </a:p>
+        </p:txBody>
+      </p:sp>
+      <p:sp>
+        <p:nvSpPr>
+          <p:cNvPr id="22" name="Rectangle 21"/>
+          <p:cNvSpPr/>
+          <p:nvPr/>
+        </p:nvSpPr>
+        <p:spPr>
+          <a:xfrm>
+            <a:off x="822960" y="4626864"/>
+            <a:ext cx="274320" cy="274320"/>
+          </a:xfrm>
+          <a:prstGeom prst="rect">
+            <a:avLst/>
+          </a:prstGeom>
+          <a:solidFill>
+            <a:srgbClr val="0D141C"/>
+          </a:solidFill>
+          <a:ln>
+            <a:noFill/>
+          </a:ln>
+          <a:effectLst/>
+        </p:spPr>
+        <p:style>
+          <a:lnRef idx="1">
+            <a:schemeClr val="accent1"/>
+          </a:lnRef>
+          <a:fillRef idx="3">
+            <a:schemeClr val="accent1"/>
+          </a:fillRef>
+          <a:effectRef idx="2">
+            <a:schemeClr val="accent1"/>
+          </a:effectRef>
+          <a:fontRef idx="minor">
+            <a:schemeClr val="lt1"/>
+          </a:fontRef>
+        </p:style>
+        <p:txBody>
+          <a:bodyPr rtlCol="0" anchor="ctr"/>
+          <a:lstStyle/>
+          <a:p>
+            <a:pPr algn="ctr"/>
+          </a:p>
+        </p:txBody>
+      </p:sp>
+      <p:sp>
+        <p:nvSpPr>
+          <p:cNvPr id="23" name="TextBox 22"/>
+          <p:cNvSpPr txBox="1"/>
+          <p:nvPr/>
+        </p:nvSpPr>
+        <p:spPr>
+          <a:xfrm>
+            <a:off x="822960" y="4677156"/>
+            <a:ext cx="274320" cy="228600"/>
+          </a:xfrm>
+          <a:prstGeom prst="rect">
+            <a:avLst/>
+          </a:prstGeom>
+          <a:noFill/>
+        </p:spPr>
+        <p:txBody>
+          <a:bodyPr wrap="square" lIns="0" rIns="0" tIns="0" bIns="0">
+            <a:spAutoFit/>
+          </a:bodyPr>
+          <a:lstStyle/>
+          <a:p>
+            <a:pPr algn="ctr">
+              <a:lnSpc>
+                <a:spcPct val="130000"/>
+              </a:lnSpc>
+            </a:pPr>
+            <a:r>
+              <a:rPr sz="1200" b="1">
+                <a:solidFill>
+                  <a:srgbClr val="F2F5F7"/>
+                </a:solidFill>
+                <a:latin typeface="Consolas"/>
+              </a:rPr>
+              <a:t>4</a:t>
+            </a:r>
+          </a:p>
+        </p:txBody>
+      </p:sp>
+      <p:sp>
+        <p:nvSpPr>
+          <p:cNvPr id="24" name="TextBox 23"/>
+          <p:cNvSpPr txBox="1"/>
+          <p:nvPr/>
+        </p:nvSpPr>
+        <p:spPr>
+          <a:xfrm>
+            <a:off x="1225296" y="4636008"/>
+            <a:ext cx="4754880" cy="228600"/>
+          </a:xfrm>
+          <a:prstGeom prst="rect">
+            <a:avLst/>
+          </a:prstGeom>
+          <a:noFill/>
+        </p:spPr>
+        <p:txBody>
+          <a:bodyPr wrap="square" lIns="0" rIns="0" tIns="0" bIns="0">
+            <a:spAutoFit/>
+          </a:bodyPr>
+          <a:lstStyle/>
+          <a:p>
+            <a:pPr algn="l">
+              <a:lnSpc>
+                <a:spcPct val="130000"/>
+              </a:lnSpc>
+            </a:pPr>
+            <a:r>
+              <a:rPr sz="1300" b="1">
+                <a:solidFill>
+                  <a:srgbClr val="0D141C"/>
+                </a:solidFill>
+                <a:latin typeface="Archivo"/>
+              </a:rPr>
+              <a:t>Score</a:t>
+            </a:r>
+          </a:p>
+        </p:txBody>
+      </p:sp>
+      <p:sp>
+        <p:nvSpPr>
+          <p:cNvPr id="25" name="TextBox 24"/>
+          <p:cNvSpPr txBox="1"/>
+          <p:nvPr/>
+        </p:nvSpPr>
+        <p:spPr>
+          <a:xfrm>
+            <a:off x="1225296" y="4882896"/>
+            <a:ext cx="4617720" cy="384048"/>
+          </a:xfrm>
+          <a:prstGeom prst="rect">
+            <a:avLst/>
+          </a:prstGeom>
+          <a:noFill/>
+        </p:spPr>
+        <p:txBody>
+          <a:bodyPr wrap="square" lIns="0" rIns="0" tIns="0" bIns="0">
+            <a:spAutoFit/>
+          </a:bodyPr>
+          <a:lstStyle/>
+          <a:p>
+            <a:pPr algn="l">
+              <a:lnSpc>
+                <a:spcPct val="125000"/>
+              </a:lnSpc>
+            </a:pPr>
+            <a:r>
+              <a:rPr sz="1050" b="0">
+                <a:solidFill>
+                  <a:srgbClr val="3B4A59"/>
+                </a:solidFill>
+                <a:latin typeface="Archivo"/>
+              </a:rPr>
+              <a:t>Compared against a deterministic reference analysis, and against what the agent's own conclusion claimed.</a:t>
+            </a:r>
+          </a:p>
+        </p:txBody>
+      </p:sp>
+      <p:sp>
+        <p:nvSpPr>
+          <p:cNvPr id="26" name="TextBox 25"/>
+          <p:cNvSpPr txBox="1"/>
+          <p:nvPr/>
+        </p:nvSpPr>
+        <p:spPr>
+          <a:xfrm>
+            <a:off x="6400800" y="1755648"/>
+            <a:ext cx="4983480" cy="228600"/>
+          </a:xfrm>
+          <a:prstGeom prst="rect">
+            <a:avLst/>
+          </a:prstGeom>
+          <a:noFill/>
+        </p:spPr>
+        <p:txBody>
+          <a:bodyPr wrap="square" lIns="0" rIns="0" tIns="0" bIns="0">
+            <a:spAutoFit/>
+          </a:bodyPr>
+          <a:lstStyle/>
+          <a:p>
+            <a:pPr algn="l">
+              <a:lnSpc>
+                <a:spcPct val="130000"/>
+              </a:lnSpc>
+            </a:pPr>
+            <a:r>
+              <a:rPr sz="1000" b="0" spc="130">
+                <a:solidFill>
+                  <a:srgbClr val="6B7A87"/>
+                </a:solidFill>
+                <a:latin typeface="Consolas"/>
+              </a:rPr>
+              <a:t>FIVE CONDITIONS</a:t>
+            </a:r>
+          </a:p>
+        </p:txBody>
+      </p:sp>
+      <p:sp>
+        <p:nvSpPr>
+          <p:cNvPr id="27" name="TextBox 26"/>
+          <p:cNvSpPr txBox="1"/>
+          <p:nvPr/>
+        </p:nvSpPr>
+        <p:spPr>
+          <a:xfrm>
+            <a:off x="7360920" y="2048256"/>
+            <a:ext cx="1600200" cy="228600"/>
+          </a:xfrm>
+          <a:prstGeom prst="rect">
+            <a:avLst/>
+          </a:prstGeom>
+          <a:noFill/>
+        </p:spPr>
+        <p:txBody>
+          <a:bodyPr wrap="square" lIns="0" rIns="0" tIns="0" bIns="0">
+            <a:spAutoFit/>
+          </a:bodyPr>
+          <a:lstStyle/>
+          <a:p>
+            <a:pPr algn="l">
+              <a:lnSpc>
+                <a:spcPct val="130000"/>
+              </a:lnSpc>
+            </a:pPr>
+            <a:r>
+              <a:rPr sz="850" b="0" spc="110">
+                <a:solidFill>
+                  <a:srgbClr val="6B7A87"/>
+                </a:solidFill>
+                <a:latin typeface="Consolas"/>
+              </a:rPr>
+              <a:t>EVIDENCE ADDED</a:t>
+            </a:r>
+          </a:p>
+        </p:txBody>
+      </p:sp>
+      <p:sp>
+        <p:nvSpPr>
+          <p:cNvPr id="28" name="TextBox 27"/>
+          <p:cNvSpPr txBox="1"/>
+          <p:nvPr/>
+        </p:nvSpPr>
+        <p:spPr>
+          <a:xfrm>
+            <a:off x="9052560" y="2048256"/>
+            <a:ext cx="2331720" cy="228600"/>
+          </a:xfrm>
+          <a:prstGeom prst="rect">
+            <a:avLst/>
+          </a:prstGeom>
+          <a:noFill/>
+        </p:spPr>
+        <p:txBody>
+          <a:bodyPr wrap="square" lIns="0" rIns="0" tIns="0" bIns="0">
+            <a:spAutoFit/>
+          </a:bodyPr>
+          <a:lstStyle/>
+          <a:p>
+            <a:pPr algn="l">
+              <a:lnSpc>
+                <a:spcPct val="130000"/>
+              </a:lnSpc>
+            </a:pPr>
+            <a:r>
+              <a:rPr sz="850" b="0" spc="110">
+                <a:solidFill>
+                  <a:srgbClr val="6B7A87"/>
+                </a:solidFill>
+                <a:latin typeface="Consolas"/>
+              </a:rPr>
+              <a:t>WHAT IT ALLOWS</a:t>
+            </a:r>
+          </a:p>
+        </p:txBody>
+      </p:sp>
+      <p:sp>
+        <p:nvSpPr>
+          <p:cNvPr id="29" name="Rectangle 28"/>
+          <p:cNvSpPr/>
+          <p:nvPr/>
+        </p:nvSpPr>
+        <p:spPr>
+          <a:xfrm>
+            <a:off x="6400800" y="2286000"/>
+            <a:ext cx="4983480" cy="12801"/>
+          </a:xfrm>
+          <a:prstGeom prst="rect">
+            <a:avLst/>
+          </a:prstGeom>
+          <a:solidFill>
+            <a:srgbClr val="0D141C"/>
+          </a:solidFill>
+          <a:ln>
+            <a:noFill/>
+          </a:ln>
+          <a:effectLst/>
+        </p:spPr>
+        <p:style>
+          <a:lnRef idx="1">
+            <a:schemeClr val="accent1"/>
+          </a:lnRef>
+          <a:fillRef idx="3">
+            <a:schemeClr val="accent1"/>
+          </a:fillRef>
+          <a:effectRef idx="2">
+            <a:schemeClr val="accent1"/>
+          </a:effectRef>
+          <a:fontRef idx="minor">
+            <a:schemeClr val="lt1"/>
+          </a:fontRef>
+        </p:style>
+        <p:txBody>
+          <a:bodyPr rtlCol="0" anchor="ctr"/>
+          <a:lstStyle/>
+          <a:p>
+            <a:pPr algn="ctr"/>
+          </a:p>
+        </p:txBody>
+      </p:sp>
+      <p:sp>
+        <p:nvSpPr>
+          <p:cNvPr id="30" name="TextBox 29"/>
+          <p:cNvSpPr txBox="1"/>
+          <p:nvPr/>
+        </p:nvSpPr>
+        <p:spPr>
+          <a:xfrm>
+            <a:off x="6400800" y="2395728"/>
+            <a:ext cx="914400" cy="256032"/>
+          </a:xfrm>
+          <a:prstGeom prst="rect">
+            <a:avLst/>
+          </a:prstGeom>
+          <a:noFill/>
+        </p:spPr>
+        <p:txBody>
+          <a:bodyPr wrap="square" lIns="0" rIns="0" tIns="0" bIns="0">
+            <a:spAutoFit/>
+          </a:bodyPr>
+          <a:lstStyle/>
+          <a:p>
+            <a:pPr algn="l">
+              <a:lnSpc>
+                <a:spcPct val="130000"/>
+              </a:lnSpc>
+            </a:pPr>
+            <a:r>
+              <a:rPr sz="1100" b="1">
+                <a:solidFill>
+                  <a:srgbClr val="0D141C"/>
+                </a:solidFill>
+                <a:latin typeface="Consolas"/>
+              </a:rPr>
+              <a:t>TEST 1</a:t>
+            </a:r>
+          </a:p>
+        </p:txBody>
+      </p:sp>
+      <p:sp>
+        <p:nvSpPr>
+          <p:cNvPr id="31" name="TextBox 30"/>
+          <p:cNvSpPr txBox="1"/>
+          <p:nvPr/>
+        </p:nvSpPr>
+        <p:spPr>
+          <a:xfrm>
+            <a:off x="7360920" y="2395728"/>
+            <a:ext cx="1600200" cy="256032"/>
+          </a:xfrm>
+          <a:prstGeom prst="rect">
+            <a:avLst/>
+          </a:prstGeom>
+          <a:noFill/>
+        </p:spPr>
+        <p:txBody>
+          <a:bodyPr wrap="square" lIns="0" rIns="0" tIns="0" bIns="0">
+            <a:spAutoFit/>
+          </a:bodyPr>
+          <a:lstStyle/>
+          <a:p>
+            <a:pPr algn="l">
+              <a:lnSpc>
+                <a:spcPct val="130000"/>
+              </a:lnSpc>
+            </a:pPr>
+            <a:r>
+              <a:rPr sz="1050" b="0">
+                <a:solidFill>
+                  <a:srgbClr val="B4741F"/>
+                </a:solidFill>
+                <a:latin typeface="Consolas"/>
+              </a:rPr>
+              <a:t>—</a:t>
+            </a:r>
+          </a:p>
+        </p:txBody>
+      </p:sp>
+      <p:sp>
+        <p:nvSpPr>
+          <p:cNvPr id="32" name="TextBox 31"/>
+          <p:cNvSpPr txBox="1"/>
+          <p:nvPr/>
+        </p:nvSpPr>
+        <p:spPr>
+          <a:xfrm>
+            <a:off x="9052560" y="2395728"/>
+            <a:ext cx="2331720" cy="182880"/>
+          </a:xfrm>
+          <a:prstGeom prst="rect">
+            <a:avLst/>
+          </a:prstGeom>
+          <a:noFill/>
+        </p:spPr>
+        <p:txBody>
+          <a:bodyPr wrap="square" lIns="0" rIns="0" tIns="0" bIns="0">
+            <a:spAutoFit/>
+          </a:bodyPr>
+          <a:lstStyle/>
+          <a:p>
+            <a:pPr algn="l">
+              <a:lnSpc>
+                <a:spcPct val="120000"/>
+              </a:lnSpc>
+            </a:pPr>
+            <a:r>
+              <a:rPr sz="1000" b="0">
+                <a:solidFill>
+                  <a:srgbClr val="3B4A59"/>
+                </a:solidFill>
+                <a:latin typeface="Archivo"/>
+              </a:rPr>
+              <a:t>nothing to judge quality with</a:t>
+            </a:r>
+          </a:p>
+        </p:txBody>
+      </p:sp>
+      <p:sp>
+        <p:nvSpPr>
+          <p:cNvPr id="33" name="TextBox 32"/>
+          <p:cNvSpPr txBox="1"/>
+          <p:nvPr/>
+        </p:nvSpPr>
+        <p:spPr>
+          <a:xfrm>
+            <a:off x="6400800" y="2798064"/>
+            <a:ext cx="914400" cy="256032"/>
+          </a:xfrm>
+          <a:prstGeom prst="rect">
+            <a:avLst/>
+          </a:prstGeom>
+          <a:noFill/>
+        </p:spPr>
+        <p:txBody>
+          <a:bodyPr wrap="square" lIns="0" rIns="0" tIns="0" bIns="0">
+            <a:spAutoFit/>
+          </a:bodyPr>
+          <a:lstStyle/>
+          <a:p>
+            <a:pPr algn="l">
+              <a:lnSpc>
+                <a:spcPct val="130000"/>
+              </a:lnSpc>
+            </a:pPr>
+            <a:r>
+              <a:rPr sz="1100" b="1">
+                <a:solidFill>
+                  <a:srgbClr val="0D141C"/>
+                </a:solidFill>
+                <a:latin typeface="Consolas"/>
+              </a:rPr>
+              <a:t>TEST 2</a:t>
+            </a:r>
+          </a:p>
+        </p:txBody>
+      </p:sp>
+      <p:sp>
+        <p:nvSpPr>
+          <p:cNvPr id="34" name="TextBox 33"/>
+          <p:cNvSpPr txBox="1"/>
+          <p:nvPr/>
+        </p:nvSpPr>
+        <p:spPr>
+          <a:xfrm>
+            <a:off x="7360920" y="2798064"/>
+            <a:ext cx="1600200" cy="256032"/>
+          </a:xfrm>
+          <a:prstGeom prst="rect">
+            <a:avLst/>
+          </a:prstGeom>
+          <a:noFill/>
+        </p:spPr>
+        <p:txBody>
+          <a:bodyPr wrap="square" lIns="0" rIns="0" tIns="0" bIns="0">
+            <a:spAutoFit/>
+          </a:bodyPr>
+          <a:lstStyle/>
+          <a:p>
+            <a:pPr algn="l">
+              <a:lnSpc>
+                <a:spcPct val="130000"/>
+              </a:lnSpc>
+            </a:pPr>
+            <a:r>
+              <a:rPr sz="1050" b="0">
+                <a:solidFill>
+                  <a:srgbClr val="B4741F"/>
+                </a:solidFill>
+                <a:latin typeface="Consolas"/>
+              </a:rPr>
+              <a:t>task</a:t>
+            </a:r>
+          </a:p>
+        </p:txBody>
+      </p:sp>
+      <p:sp>
+        <p:nvSpPr>
+          <p:cNvPr id="35" name="TextBox 34"/>
+          <p:cNvSpPr txBox="1"/>
+          <p:nvPr/>
+        </p:nvSpPr>
+        <p:spPr>
+          <a:xfrm>
+            <a:off x="9052560" y="2798064"/>
+            <a:ext cx="2331720" cy="182880"/>
+          </a:xfrm>
+          <a:prstGeom prst="rect">
+            <a:avLst/>
+          </a:prstGeom>
+          <a:noFill/>
+        </p:spPr>
+        <p:txBody>
+          <a:bodyPr wrap="square" lIns="0" rIns="0" tIns="0" bIns="0">
+            <a:spAutoFit/>
+          </a:bodyPr>
+          <a:lstStyle/>
+          <a:p>
+            <a:pPr algn="l">
+              <a:lnSpc>
+                <a:spcPct val="120000"/>
+              </a:lnSpc>
+            </a:pPr>
+            <a:r>
+              <a:rPr sz="1000" b="0">
+                <a:solidFill>
+                  <a:srgbClr val="3B4A59"/>
+                </a:solidFill>
+                <a:latin typeface="Archivo"/>
+              </a:rPr>
+              <a:t>accuracy, response times</a:t>
+            </a:r>
+          </a:p>
+        </p:txBody>
+      </p:sp>
+      <p:sp>
+        <p:nvSpPr>
+          <p:cNvPr id="36" name="TextBox 35"/>
+          <p:cNvSpPr txBox="1"/>
+          <p:nvPr/>
+        </p:nvSpPr>
+        <p:spPr>
+          <a:xfrm>
+            <a:off x="6400800" y="3200400"/>
+            <a:ext cx="914400" cy="256032"/>
+          </a:xfrm>
+          <a:prstGeom prst="rect">
+            <a:avLst/>
+          </a:prstGeom>
+          <a:noFill/>
+        </p:spPr>
+        <p:txBody>
+          <a:bodyPr wrap="square" lIns="0" rIns="0" tIns="0" bIns="0">
+            <a:spAutoFit/>
+          </a:bodyPr>
+          <a:lstStyle/>
+          <a:p>
+            <a:pPr algn="l">
+              <a:lnSpc>
+                <a:spcPct val="130000"/>
+              </a:lnSpc>
+            </a:pPr>
+            <a:r>
+              <a:rPr sz="1100" b="1">
+                <a:solidFill>
+                  <a:srgbClr val="0D141C"/>
+                </a:solidFill>
+                <a:latin typeface="Consolas"/>
+              </a:rPr>
+              <a:t>TEST 3</a:t>
+            </a:r>
+          </a:p>
+        </p:txBody>
+      </p:sp>
+      <p:sp>
+        <p:nvSpPr>
+          <p:cNvPr id="37" name="TextBox 36"/>
+          <p:cNvSpPr txBox="1"/>
+          <p:nvPr/>
+        </p:nvSpPr>
+        <p:spPr>
+          <a:xfrm>
+            <a:off x="7360920" y="3200400"/>
+            <a:ext cx="1600200" cy="256032"/>
+          </a:xfrm>
+          <a:prstGeom prst="rect">
+            <a:avLst/>
+          </a:prstGeom>
+          <a:noFill/>
+        </p:spPr>
+        <p:txBody>
+          <a:bodyPr wrap="square" lIns="0" rIns="0" tIns="0" bIns="0">
+            <a:spAutoFit/>
+          </a:bodyPr>
+          <a:lstStyle/>
+          <a:p>
+            <a:pPr algn="l">
+              <a:lnSpc>
+                <a:spcPct val="130000"/>
+              </a:lnSpc>
+            </a:pPr>
+            <a:r>
+              <a:rPr sz="1050" b="0">
+                <a:solidFill>
+                  <a:srgbClr val="B4741F"/>
+                </a:solidFill>
+                <a:latin typeface="Consolas"/>
+              </a:rPr>
+              <a:t>survey</a:t>
+            </a:r>
+          </a:p>
+        </p:txBody>
+      </p:sp>
+      <p:sp>
+        <p:nvSpPr>
+          <p:cNvPr id="38" name="TextBox 37"/>
+          <p:cNvSpPr txBox="1"/>
+          <p:nvPr/>
+        </p:nvSpPr>
+        <p:spPr>
+          <a:xfrm>
+            <a:off x="9052560" y="3200400"/>
+            <a:ext cx="2331720" cy="182880"/>
+          </a:xfrm>
+          <a:prstGeom prst="rect">
+            <a:avLst/>
+          </a:prstGeom>
+          <a:noFill/>
+        </p:spPr>
+        <p:txBody>
+          <a:bodyPr wrap="square" lIns="0" rIns="0" tIns="0" bIns="0">
+            <a:spAutoFit/>
+          </a:bodyPr>
+          <a:lstStyle/>
+          <a:p>
+            <a:pPr algn="l">
+              <a:lnSpc>
+                <a:spcPct val="120000"/>
+              </a:lnSpc>
+            </a:pPr>
+            <a:r>
+              <a:rPr sz="1000" b="0">
+                <a:solidFill>
+                  <a:srgbClr val="3B4A59"/>
+                </a:solidFill>
+                <a:latin typeface="Archivo"/>
+              </a:rPr>
+              <a:t>per-item responses</a:t>
+            </a:r>
+          </a:p>
+        </p:txBody>
+      </p:sp>
+      <p:sp>
+        <p:nvSpPr>
+          <p:cNvPr id="39" name="TextBox 38"/>
+          <p:cNvSpPr txBox="1"/>
+          <p:nvPr/>
+        </p:nvSpPr>
+        <p:spPr>
+          <a:xfrm>
+            <a:off x="6400800" y="3602736"/>
+            <a:ext cx="914400" cy="256032"/>
+          </a:xfrm>
+          <a:prstGeom prst="rect">
+            <a:avLst/>
+          </a:prstGeom>
+          <a:noFill/>
+        </p:spPr>
+        <p:txBody>
+          <a:bodyPr wrap="square" lIns="0" rIns="0" tIns="0" bIns="0">
+            <a:spAutoFit/>
+          </a:bodyPr>
+          <a:lstStyle/>
+          <a:p>
+            <a:pPr algn="l">
+              <a:lnSpc>
+                <a:spcPct val="130000"/>
+              </a:lnSpc>
+            </a:pPr>
+            <a:r>
+              <a:rPr sz="1100" b="1">
+                <a:solidFill>
+                  <a:srgbClr val="0D141C"/>
+                </a:solidFill>
+                <a:latin typeface="Consolas"/>
+              </a:rPr>
+              <a:t>TEST 4</a:t>
+            </a:r>
+          </a:p>
+        </p:txBody>
+      </p:sp>
+      <p:sp>
+        <p:nvSpPr>
+          <p:cNvPr id="40" name="TextBox 39"/>
+          <p:cNvSpPr txBox="1"/>
+          <p:nvPr/>
+        </p:nvSpPr>
+        <p:spPr>
+          <a:xfrm>
+            <a:off x="7360920" y="3602736"/>
+            <a:ext cx="1600200" cy="256032"/>
+          </a:xfrm>
+          <a:prstGeom prst="rect">
+            <a:avLst/>
+          </a:prstGeom>
+          <a:noFill/>
+        </p:spPr>
+        <p:txBody>
+          <a:bodyPr wrap="square" lIns="0" rIns="0" tIns="0" bIns="0">
+            <a:spAutoFit/>
+          </a:bodyPr>
+          <a:lstStyle/>
+          <a:p>
+            <a:pPr algn="l">
+              <a:lnSpc>
+                <a:spcPct val="130000"/>
+              </a:lnSpc>
+            </a:pPr>
+            <a:r>
+              <a:rPr sz="1050" b="0">
+                <a:solidFill>
+                  <a:srgbClr val="B4741F"/>
+                </a:solidFill>
+                <a:latin typeface="Consolas"/>
+              </a:rPr>
+              <a:t>task + survey</a:t>
+            </a:r>
+          </a:p>
+        </p:txBody>
+      </p:sp>
+      <p:sp>
+        <p:nvSpPr>
+          <p:cNvPr id="41" name="TextBox 40"/>
+          <p:cNvSpPr txBox="1"/>
+          <p:nvPr/>
+        </p:nvSpPr>
+        <p:spPr>
+          <a:xfrm>
+            <a:off x="9052560" y="3602736"/>
+            <a:ext cx="2331720" cy="182880"/>
+          </a:xfrm>
+          <a:prstGeom prst="rect">
+            <a:avLst/>
+          </a:prstGeom>
+          <a:noFill/>
+        </p:spPr>
+        <p:txBody>
+          <a:bodyPr wrap="square" lIns="0" rIns="0" tIns="0" bIns="0">
+            <a:spAutoFit/>
+          </a:bodyPr>
+          <a:lstStyle/>
+          <a:p>
+            <a:pPr algn="l">
+              <a:lnSpc>
+                <a:spcPct val="120000"/>
+              </a:lnSpc>
+            </a:pPr>
+            <a:r>
+              <a:rPr sz="1000" b="0">
+                <a:solidFill>
+                  <a:srgbClr val="3B4A59"/>
+                </a:solidFill>
+                <a:latin typeface="Archivo"/>
+              </a:rPr>
+              <a:t>both proxies</a:t>
+            </a:r>
+          </a:p>
+        </p:txBody>
+      </p:sp>
+      <p:sp>
+        <p:nvSpPr>
+          <p:cNvPr id="42" name="TextBox 41"/>
+          <p:cNvSpPr txBox="1"/>
+          <p:nvPr/>
+        </p:nvSpPr>
+        <p:spPr>
+          <a:xfrm>
+            <a:off x="6400800" y="4005072"/>
+            <a:ext cx="914400" cy="256032"/>
+          </a:xfrm>
+          <a:prstGeom prst="rect">
+            <a:avLst/>
+          </a:prstGeom>
+          <a:noFill/>
+        </p:spPr>
+        <p:txBody>
+          <a:bodyPr wrap="square" lIns="0" rIns="0" tIns="0" bIns="0">
+            <a:spAutoFit/>
+          </a:bodyPr>
+          <a:lstStyle/>
+          <a:p>
+            <a:pPr algn="l">
+              <a:lnSpc>
+                <a:spcPct val="130000"/>
+              </a:lnSpc>
+            </a:pPr>
+            <a:r>
+              <a:rPr sz="1100" b="1">
+                <a:solidFill>
+                  <a:srgbClr val="0D141C"/>
+                </a:solidFill>
+                <a:latin typeface="Consolas"/>
+              </a:rPr>
+              <a:t>TEST 5</a:t>
+            </a:r>
+          </a:p>
+        </p:txBody>
+      </p:sp>
+      <p:sp>
+        <p:nvSpPr>
+          <p:cNvPr id="43" name="TextBox 42"/>
+          <p:cNvSpPr txBox="1"/>
+          <p:nvPr/>
+        </p:nvSpPr>
+        <p:spPr>
+          <a:xfrm>
+            <a:off x="7360920" y="4005072"/>
+            <a:ext cx="1600200" cy="256032"/>
+          </a:xfrm>
+          <a:prstGeom prst="rect">
+            <a:avLst/>
+          </a:prstGeom>
+          <a:noFill/>
+        </p:spPr>
+        <p:txBody>
+          <a:bodyPr wrap="square" lIns="0" rIns="0" tIns="0" bIns="0">
+            <a:spAutoFit/>
+          </a:bodyPr>
+          <a:lstStyle/>
+          <a:p>
+            <a:pPr algn="l">
+              <a:lnSpc>
+                <a:spcPct val="130000"/>
+              </a:lnSpc>
+            </a:pPr>
+            <a:r>
+              <a:rPr sz="1050" b="0">
+                <a:solidFill>
+                  <a:srgbClr val="B4741F"/>
+                </a:solidFill>
+                <a:latin typeface="Consolas"/>
+              </a:rPr>
+              <a:t>+ metrics</a:t>
+            </a:r>
+          </a:p>
+        </p:txBody>
+      </p:sp>
+      <p:sp>
+        <p:nvSpPr>
+          <p:cNvPr id="44" name="TextBox 43"/>
+          <p:cNvSpPr txBox="1"/>
+          <p:nvPr/>
+        </p:nvSpPr>
+        <p:spPr>
+          <a:xfrm>
+            <a:off x="9052560" y="4005072"/>
+            <a:ext cx="2331720" cy="182880"/>
+          </a:xfrm>
+          <a:prstGeom prst="rect">
+            <a:avLst/>
+          </a:prstGeom>
+          <a:noFill/>
+        </p:spPr>
+        <p:txBody>
+          <a:bodyPr wrap="square" lIns="0" rIns="0" tIns="0" bIns="0">
+            <a:spAutoFit/>
+          </a:bodyPr>
+          <a:lstStyle/>
+          <a:p>
+            <a:pPr algn="l">
+              <a:lnSpc>
+                <a:spcPct val="120000"/>
+              </a:lnSpc>
+            </a:pPr>
+            <a:r>
+              <a:rPr sz="1000" b="0">
+                <a:solidFill>
+                  <a:srgbClr val="3B4A59"/>
+                </a:solidFill>
+                <a:latin typeface="Archivo"/>
+              </a:rPr>
+              <a:t>the study's own attention checks</a:t>
+            </a:r>
+          </a:p>
+        </p:txBody>
+      </p:sp>
+      <p:sp>
+        <p:nvSpPr>
+          <p:cNvPr id="45" name="Rectangle 44"/>
+          <p:cNvSpPr/>
+          <p:nvPr/>
+        </p:nvSpPr>
+        <p:spPr>
+          <a:xfrm>
+            <a:off x="6400800" y="4352544"/>
+            <a:ext cx="4983480" cy="12801"/>
+          </a:xfrm>
+          <a:prstGeom prst="rect">
+            <a:avLst/>
+          </a:prstGeom>
+          <a:solidFill>
+            <a:srgbClr val="D3DBE2"/>
+          </a:solidFill>
+          <a:ln>
+            <a:noFill/>
+          </a:ln>
+          <a:effectLst/>
+        </p:spPr>
+        <p:style>
+          <a:lnRef idx="1">
+            <a:schemeClr val="accent1"/>
+          </a:lnRef>
+          <a:fillRef idx="3">
+            <a:schemeClr val="accent1"/>
+          </a:fillRef>
+          <a:effectRef idx="2">
+            <a:schemeClr val="accent1"/>
+          </a:effectRef>
+          <a:fontRef idx="minor">
+            <a:schemeClr val="lt1"/>
+          </a:fontRef>
+        </p:style>
+        <p:txBody>
+          <a:bodyPr rtlCol="0" anchor="ctr"/>
+          <a:lstStyle/>
+          <a:p>
+            <a:pPr algn="ctr"/>
+          </a:p>
+        </p:txBody>
+      </p:sp>
+      <p:sp>
+        <p:nvSpPr>
+          <p:cNvPr id="46" name="TextBox 45"/>
+          <p:cNvSpPr txBox="1"/>
+          <p:nvPr/>
+        </p:nvSpPr>
+        <p:spPr>
+          <a:xfrm>
+            <a:off x="6400800" y="4535424"/>
+            <a:ext cx="4983480" cy="548640"/>
+          </a:xfrm>
+          <a:prstGeom prst="rect">
+            <a:avLst/>
+          </a:prstGeom>
+          <a:noFill/>
+        </p:spPr>
+        <p:txBody>
+          <a:bodyPr wrap="square" lIns="0" rIns="0" tIns="0" bIns="0">
+            <a:spAutoFit/>
+          </a:bodyPr>
+          <a:lstStyle/>
+          <a:p>
+            <a:pPr algn="l">
+              <a:lnSpc>
+                <a:spcPct val="130000"/>
+              </a:lnSpc>
+            </a:pPr>
+            <a:r>
+              <a:rPr sz="1000" b="0">
+                <a:solidFill>
+                  <a:srgbClr val="6B7A87"/>
+                </a:solidFill>
+                <a:latin typeface="Archivo"/>
+              </a:rPr>
+              <a:t>Difficulty falls from TEST 1 to TEST 5. TEST 1 has no basis for exclusion at all — declining to exclude is the correct answer there.</a:t>
+            </a:r>
+          </a:p>
+        </p:txBody>
+      </p:sp>
+      <p:sp>
+        <p:nvSpPr>
+          <p:cNvPr id="47" name="Rectangle 46"/>
+          <p:cNvSpPr/>
+          <p:nvPr/>
+        </p:nvSpPr>
+        <p:spPr>
+          <a:xfrm>
+            <a:off x="822960" y="5742432"/>
+            <a:ext cx="10561320" cy="822960"/>
+          </a:xfrm>
+          <a:prstGeom prst="rect">
+            <a:avLst/>
+          </a:prstGeom>
+          <a:solidFill>
+            <a:srgbClr val="FFFFFF"/>
+          </a:solidFill>
+          <a:ln w="9525">
+            <a:solidFill>
+              <a:srgbClr val="D3DBE2"/>
+            </a:solidFill>
+          </a:ln>
+          <a:effectLst/>
+        </p:spPr>
+        <p:style>
+          <a:lnRef idx="1">
+            <a:schemeClr val="accent1"/>
+          </a:lnRef>
+          <a:fillRef idx="3">
+            <a:schemeClr val="accent1"/>
+          </a:fillRef>
+          <a:effectRef idx="2">
+            <a:schemeClr val="accent1"/>
+          </a:effectRef>
+          <a:fontRef idx="minor">
+            <a:schemeClr val="lt1"/>
+          </a:fontRef>
+        </p:style>
+        <p:txBody>
+          <a:bodyPr rtlCol="0" anchor="ctr"/>
+          <a:lstStyle/>
+          <a:p>
+            <a:pPr algn="ctr"/>
+          </a:p>
+        </p:txBody>
+      </p:sp>
+      <p:sp>
+        <p:nvSpPr>
+          <p:cNvPr id="48" name="Rectangle 47"/>
+          <p:cNvSpPr/>
+          <p:nvPr/>
+        </p:nvSpPr>
+        <p:spPr>
+          <a:xfrm>
+            <a:off x="822960" y="5742432"/>
+            <a:ext cx="45720" cy="822960"/>
+          </a:xfrm>
+          <a:prstGeom prst="rect">
+            <a:avLst/>
+          </a:prstGeom>
+          <a:solidFill>
+            <a:srgbClr val="B4741F"/>
+          </a:solidFill>
+          <a:ln>
+            <a:noFill/>
+          </a:ln>
+          <a:effectLst/>
+        </p:spPr>
+        <p:style>
+          <a:lnRef idx="1">
+            <a:schemeClr val="accent1"/>
+          </a:lnRef>
+          <a:fillRef idx="3">
+            <a:schemeClr val="accent1"/>
+          </a:fillRef>
+          <a:effectRef idx="2">
+            <a:schemeClr val="accent1"/>
+          </a:effectRef>
+          <a:fontRef idx="minor">
+            <a:schemeClr val="lt1"/>
+          </a:fontRef>
+        </p:style>
+        <p:txBody>
+          <a:bodyPr rtlCol="0" anchor="ctr"/>
+          <a:lstStyle/>
+          <a:p>
+            <a:pPr algn="ctr"/>
+          </a:p>
+        </p:txBody>
+      </p:sp>
+      <p:sp>
+        <p:nvSpPr>
+          <p:cNvPr id="49" name="TextBox 48"/>
+          <p:cNvSpPr txBox="1"/>
+          <p:nvPr/>
+        </p:nvSpPr>
+        <p:spPr>
+          <a:xfrm>
+            <a:off x="1042415" y="5870448"/>
+            <a:ext cx="10149840" cy="228600"/>
+          </a:xfrm>
+          <a:prstGeom prst="rect">
+            <a:avLst/>
+          </a:prstGeom>
+          <a:noFill/>
+        </p:spPr>
+        <p:txBody>
+          <a:bodyPr wrap="square" lIns="0" rIns="0" tIns="0" bIns="0">
+            <a:spAutoFit/>
+          </a:bodyPr>
+          <a:lstStyle/>
+          <a:p>
+            <a:pPr algn="l">
+              <a:lnSpc>
+                <a:spcPct val="130000"/>
+              </a:lnSpc>
+            </a:pPr>
+            <a:r>
+              <a:rPr sz="1050" b="1">
+                <a:solidFill>
+                  <a:srgbClr val="0D141C"/>
+                </a:solidFill>
+                <a:latin typeface="Archivo"/>
+              </a:rPr>
+              <a:t>Controls</a:t>
+            </a:r>
+          </a:p>
+        </p:txBody>
+      </p:sp>
+      <p:sp>
+        <p:nvSpPr>
+          <p:cNvPr id="50" name="TextBox 49"/>
+          <p:cNvSpPr txBox="1"/>
+          <p:nvPr/>
+        </p:nvSpPr>
+        <p:spPr>
+          <a:xfrm>
+            <a:off x="1042415" y="6108192"/>
+            <a:ext cx="10149840" cy="365760"/>
+          </a:xfrm>
+          <a:prstGeom prst="rect">
+            <a:avLst/>
+          </a:prstGeom>
+          <a:noFill/>
+        </p:spPr>
+        <p:txBody>
+          <a:bodyPr wrap="square" lIns="0" rIns="0" tIns="0" bIns="0">
+            <a:spAutoFit/>
+          </a:bodyPr>
+          <a:lstStyle/>
+          <a:p>
+            <a:pPr algn="l">
+              <a:lnSpc>
+                <a:spcPct val="130000"/>
+              </a:lnSpc>
+            </a:pPr>
+            <a:r>
+              <a:rPr sz="1000" b="0">
+                <a:solidFill>
+                  <a:srgbClr val="3B4A59"/>
+                </a:solidFill>
+                <a:latin typeface="Archivo"/>
+              </a:rPr>
+              <a:t>Correlations always run on the same 386-subject table, so n is identical in every condition  ·  the study's own attention-check labels are held out and used only to score exclusions  ·  the reference analysis is deterministic (scipy), no model involved.</a:t>
+            </a:r>
+          </a:p>
+        </p:txBody>
+      </p:sp>
+    </p:spTree>
+  </p:cSld>
+  <p:clrMapOvr>
+    <a:masterClrMapping/>
+  </p:clrMapOvr>
+</p:sld>
+</file>
+
+<file path=ppt/slides/slide4.xml><?xml version="1.0" encoding="utf-8"?>
+<p:sld xmlns:a="http://schemas.openxmlformats.org/drawingml/2006/main" xmlns:p="http://schemas.openxmlformats.org/presentationml/2006/main" xmlns:r="http://schemas.openxmlformats.org/officeDocument/2006/relationships">
+  <p:cSld>
+    <p:bg>
+      <p:bgPr>
+        <a:solidFill>
+          <a:srgbClr val="F2F5F7"/>
+        </a:solidFill>
+        <a:effectLst/>
+      </p:bgPr>
+    </p:bg>
+    <p:spTree>
+      <p:nvGrpSpPr>
+        <p:cNvPr id="1" name=""/>
+        <p:cNvGrpSpPr/>
+        <p:nvPr/>
+      </p:nvGrpSpPr>
+      <p:grpSpPr/>
+      <p:sp>
+        <p:nvSpPr>
+          <p:cNvPr id="2" name="Rectangle 1"/>
+          <p:cNvSpPr/>
+          <p:nvPr/>
+        </p:nvSpPr>
+        <p:spPr>
+          <a:xfrm>
+            <a:off x="0" y="0"/>
+            <a:ext cx="100584" cy="6858000"/>
+          </a:xfrm>
+          <a:prstGeom prst="rect">
+            <a:avLst/>
+          </a:prstGeom>
+          <a:solidFill>
             <a:srgbClr val="2F7565"/>
           </a:solidFill>
           <a:ln>
@@ -4313,7 +6298,7 @@
                 </a:solidFill>
                 <a:latin typeface="Consolas"/>
               </a:rPr>
-              <a:t>02</a:t>
+              <a:t>03</a:t>
             </a:r>
           </a:p>
         </p:txBody>
